--- a/skills/deck-toss/examples/toss-6p.pptx
+++ b/skills/deck-toss/examples/toss-6p.pptx
@@ -3121,7 +3121,7 @@
             <a:avLst/>
           </a:prstGeom>
           <a:solidFill>
-            <a:srgbClr val="0064FF"/>
+            <a:srgbClr val="FFFFFF"/>
           </a:solidFill>
           <a:ln>
             <a:noFill/>
@@ -3629,7 +3629,7 @@
             <a:avLst/>
           </a:prstGeom>
           <a:solidFill>
-            <a:srgbClr val="0064FF"/>
+            <a:srgbClr val="FFFFFF"/>
           </a:solidFill>
           <a:ln>
             <a:noFill/>

--- a/skills/deck-toss/examples/toss-6p.pptx
+++ b/skills/deck-toss/examples/toss-6p.pptx
@@ -3159,7 +3159,7 @@
         <p:spPr>
           <a:xfrm>
             <a:off x="603504" y="868680"/>
-            <a:ext cx="10058400" cy="457200"/>
+            <a:ext cx="10515600" cy="457200"/>
           </a:xfrm>
           <a:prstGeom prst="rect">
             <a:avLst/>
@@ -3338,16 +3338,40 @@
           </a:p>
         </p:txBody>
       </p:sp>
-      <p:sp>
-        <p:nvSpPr>
-          <p:cNvPr id="3" name="TextBox 2"/>
+      <p:pic>
+        <p:nvPicPr>
+          <p:cNvPr id="3" name="Picture 2" descr="trending-up-ad54c90b.png"/>
+          <p:cNvPicPr>
+            <a:picLocks noChangeAspect="1"/>
+          </p:cNvPicPr>
+          <p:nvPr/>
+        </p:nvPicPr>
+        <p:blipFill>
+          <a:blip r:embed="rId2"/>
+          <a:stretch>
+            <a:fillRect/>
+          </a:stretch>
+        </p:blipFill>
+        <p:spPr>
+          <a:xfrm>
+            <a:off x="566928" y="877824"/>
+            <a:ext cx="384048" cy="384048"/>
+          </a:xfrm>
+          <a:prstGeom prst="rect">
+            <a:avLst/>
+          </a:prstGeom>
+        </p:spPr>
+      </p:pic>
+      <p:sp>
+        <p:nvSpPr>
+          <p:cNvPr id="4" name="TextBox 3"/>
           <p:cNvSpPr txBox="1"/>
           <p:nvPr/>
         </p:nvSpPr>
         <p:spPr>
           <a:xfrm>
-            <a:off x="566928" y="841248"/>
-            <a:ext cx="11064240" cy="914400"/>
+            <a:off x="1097280" y="841248"/>
+            <a:ext cx="10533888" cy="914400"/>
           </a:xfrm>
           <a:prstGeom prst="rect">
             <a:avLst/>
@@ -3386,7 +3410,7 @@
       </p:sp>
       <p:sp>
         <p:nvSpPr>
-          <p:cNvPr id="4" name="TextBox 3"/>
+          <p:cNvPr id="5" name="TextBox 4"/>
           <p:cNvSpPr txBox="1"/>
           <p:nvPr/>
         </p:nvSpPr>
@@ -3432,7 +3456,7 @@
       </p:sp>
       <p:sp>
         <p:nvSpPr>
-          <p:cNvPr id="5" name="Rectangle 4"/>
+          <p:cNvPr id="6" name="Rectangle 5"/>
           <p:cNvSpPr/>
           <p:nvPr/>
         </p:nvSpPr>
@@ -3476,7 +3500,7 @@
       </p:sp>
       <p:sp>
         <p:nvSpPr>
-          <p:cNvPr id="6" name="Rectangle 5"/>
+          <p:cNvPr id="7" name="Rectangle 6"/>
           <p:cNvSpPr/>
           <p:nvPr/>
         </p:nvSpPr>
@@ -3520,14 +3544,14 @@
       </p:sp>
       <p:pic>
         <p:nvPicPr>
-          <p:cNvPr id="7" name="Picture 6" descr="kpi_2.png"/>
+          <p:cNvPr id="8" name="Picture 7" descr="kpi_2.png"/>
           <p:cNvPicPr>
             <a:picLocks noChangeAspect="1"/>
           </p:cNvPicPr>
           <p:nvPr/>
         </p:nvPicPr>
         <p:blipFill>
-          <a:blip r:embed="rId2"/>
+          <a:blip r:embed="rId3"/>
           <a:stretch>
             <a:fillRect/>
           </a:stretch>
@@ -3544,7 +3568,7 @@
       </p:pic>
       <p:sp>
         <p:nvSpPr>
-          <p:cNvPr id="8" name="TextBox 7"/>
+          <p:cNvPr id="9" name="TextBox 8"/>
           <p:cNvSpPr txBox="1"/>
           <p:nvPr/>
         </p:nvSpPr>
@@ -3614,9 +3638,33 @@
         <p:nvPr/>
       </p:nvGrpSpPr>
       <p:grpSpPr/>
-      <p:sp>
-        <p:nvSpPr>
-          <p:cNvPr id="2" name="Rectangle 1"/>
+      <p:pic>
+        <p:nvPicPr>
+          <p:cNvPr id="2" name="Picture 1" descr="flag-7366ecb8.png"/>
+          <p:cNvPicPr>
+            <a:picLocks noChangeAspect="1"/>
+          </p:cNvPicPr>
+          <p:nvPr/>
+        </p:nvPicPr>
+        <p:blipFill>
+          <a:blip r:embed="rId2"/>
+          <a:stretch>
+            <a:fillRect/>
+          </a:stretch>
+        </p:blipFill>
+        <p:spPr>
+          <a:xfrm>
+            <a:off x="566928" y="1828800"/>
+            <a:ext cx="566928" cy="566928"/>
+          </a:xfrm>
+          <a:prstGeom prst="rect">
+            <a:avLst/>
+          </a:prstGeom>
+        </p:spPr>
+      </p:pic>
+      <p:sp>
+        <p:nvSpPr>
+          <p:cNvPr id="3" name="Rectangle 2"/>
           <p:cNvSpPr/>
           <p:nvPr/>
         </p:nvSpPr>
@@ -3660,7 +3708,7 @@
       </p:sp>
       <p:sp>
         <p:nvSpPr>
-          <p:cNvPr id="3" name="TextBox 2"/>
+          <p:cNvPr id="4" name="TextBox 3"/>
           <p:cNvSpPr txBox="1"/>
           <p:nvPr/>
         </p:nvSpPr>
@@ -3730,7 +3778,7 @@
       </p:sp>
       <p:sp>
         <p:nvSpPr>
-          <p:cNvPr id="4" name="TextBox 3"/>
+          <p:cNvPr id="5" name="TextBox 4"/>
           <p:cNvSpPr txBox="1"/>
           <p:nvPr/>
         </p:nvSpPr>
@@ -5124,16 +5172,40 @@
           </a:p>
         </p:txBody>
       </p:sp>
-      <p:sp>
-        <p:nvSpPr>
-          <p:cNvPr id="3" name="TextBox 2"/>
+      <p:pic>
+        <p:nvPicPr>
+          <p:cNvPr id="3" name="Picture 2" descr="layout-grid-47e949ad.png"/>
+          <p:cNvPicPr>
+            <a:picLocks noChangeAspect="1"/>
+          </p:cNvPicPr>
+          <p:nvPr/>
+        </p:nvPicPr>
+        <p:blipFill>
+          <a:blip r:embed="rId2"/>
+          <a:stretch>
+            <a:fillRect/>
+          </a:stretch>
+        </p:blipFill>
+        <p:spPr>
+          <a:xfrm>
+            <a:off x="566928" y="877824"/>
+            <a:ext cx="384048" cy="384048"/>
+          </a:xfrm>
+          <a:prstGeom prst="rect">
+            <a:avLst/>
+          </a:prstGeom>
+        </p:spPr>
+      </p:pic>
+      <p:sp>
+        <p:nvSpPr>
+          <p:cNvPr id="4" name="TextBox 3"/>
           <p:cNvSpPr txBox="1"/>
           <p:nvPr/>
         </p:nvSpPr>
         <p:spPr>
           <a:xfrm>
-            <a:off x="566928" y="841248"/>
-            <a:ext cx="11064240" cy="914400"/>
+            <a:off x="1097280" y="841248"/>
+            <a:ext cx="10533888" cy="914400"/>
           </a:xfrm>
           <a:prstGeom prst="rect">
             <a:avLst/>
@@ -5172,7 +5244,7 @@
       </p:sp>
       <p:sp>
         <p:nvSpPr>
-          <p:cNvPr id="4" name="TextBox 3"/>
+          <p:cNvPr id="5" name="TextBox 4"/>
           <p:cNvSpPr txBox="1"/>
           <p:nvPr/>
         </p:nvSpPr>
@@ -5218,7 +5290,7 @@
       </p:sp>
       <p:sp>
         <p:nvSpPr>
-          <p:cNvPr id="5" name="Rectangle 4"/>
+          <p:cNvPr id="6" name="Rectangle 5"/>
           <p:cNvSpPr/>
           <p:nvPr/>
         </p:nvSpPr>
@@ -5262,7 +5334,7 @@
       </p:sp>
       <p:sp>
         <p:nvSpPr>
-          <p:cNvPr id="6" name="Rectangle 5"/>
+          <p:cNvPr id="7" name="Rectangle 6"/>
           <p:cNvSpPr/>
           <p:nvPr/>
         </p:nvSpPr>
@@ -5306,7 +5378,7 @@
       </p:sp>
       <p:sp>
         <p:nvSpPr>
-          <p:cNvPr id="7" name="TextBox 6"/>
+          <p:cNvPr id="8" name="TextBox 7"/>
           <p:cNvSpPr txBox="1"/>
           <p:nvPr/>
         </p:nvSpPr>
@@ -5352,7 +5424,7 @@
       </p:sp>
       <p:sp>
         <p:nvSpPr>
-          <p:cNvPr id="8" name="TextBox 7"/>
+          <p:cNvPr id="9" name="TextBox 8"/>
           <p:cNvSpPr txBox="1"/>
           <p:nvPr/>
         </p:nvSpPr>
@@ -5398,7 +5470,7 @@
       </p:sp>
       <p:sp>
         <p:nvSpPr>
-          <p:cNvPr id="9" name="TextBox 8"/>
+          <p:cNvPr id="10" name="TextBox 9"/>
           <p:cNvSpPr txBox="1"/>
           <p:nvPr/>
         </p:nvSpPr>
@@ -5444,7 +5516,7 @@
       </p:sp>
       <p:sp>
         <p:nvSpPr>
-          <p:cNvPr id="10" name="TextBox 9"/>
+          <p:cNvPr id="11" name="TextBox 10"/>
           <p:cNvSpPr txBox="1"/>
           <p:nvPr/>
         </p:nvSpPr>
@@ -5490,7 +5562,7 @@
       </p:sp>
       <p:sp>
         <p:nvSpPr>
-          <p:cNvPr id="11" name="TextBox 10"/>
+          <p:cNvPr id="12" name="TextBox 11"/>
           <p:cNvSpPr txBox="1"/>
           <p:nvPr/>
         </p:nvSpPr>
@@ -5536,7 +5608,7 @@
       </p:sp>
       <p:sp>
         <p:nvSpPr>
-          <p:cNvPr id="12" name="TextBox 11"/>
+          <p:cNvPr id="13" name="TextBox 12"/>
           <p:cNvSpPr txBox="1"/>
           <p:nvPr/>
         </p:nvSpPr>
@@ -5582,7 +5654,7 @@
       </p:sp>
       <p:sp>
         <p:nvSpPr>
-          <p:cNvPr id="13" name="Rectangle 12"/>
+          <p:cNvPr id="14" name="Rectangle 13"/>
           <p:cNvSpPr/>
           <p:nvPr/>
         </p:nvSpPr>
@@ -5626,7 +5698,7 @@
       </p:sp>
       <p:sp>
         <p:nvSpPr>
-          <p:cNvPr id="14" name="Rectangle 13"/>
+          <p:cNvPr id="15" name="Rectangle 14"/>
           <p:cNvSpPr/>
           <p:nvPr/>
         </p:nvSpPr>
@@ -5670,7 +5742,7 @@
       </p:sp>
       <p:sp>
         <p:nvSpPr>
-          <p:cNvPr id="15" name="TextBox 14"/>
+          <p:cNvPr id="16" name="TextBox 15"/>
           <p:cNvSpPr txBox="1"/>
           <p:nvPr/>
         </p:nvSpPr>
@@ -5716,7 +5788,7 @@
       </p:sp>
       <p:sp>
         <p:nvSpPr>
-          <p:cNvPr id="16" name="TextBox 15"/>
+          <p:cNvPr id="17" name="TextBox 16"/>
           <p:cNvSpPr txBox="1"/>
           <p:nvPr/>
         </p:nvSpPr>
@@ -5762,7 +5834,7 @@
       </p:sp>
       <p:sp>
         <p:nvSpPr>
-          <p:cNvPr id="17" name="TextBox 16"/>
+          <p:cNvPr id="18" name="TextBox 17"/>
           <p:cNvSpPr txBox="1"/>
           <p:nvPr/>
         </p:nvSpPr>
@@ -5808,7 +5880,7 @@
       </p:sp>
       <p:sp>
         <p:nvSpPr>
-          <p:cNvPr id="18" name="TextBox 17"/>
+          <p:cNvPr id="19" name="TextBox 18"/>
           <p:cNvSpPr txBox="1"/>
           <p:nvPr/>
         </p:nvSpPr>
@@ -5854,7 +5926,7 @@
       </p:sp>
       <p:sp>
         <p:nvSpPr>
-          <p:cNvPr id="19" name="TextBox 18"/>
+          <p:cNvPr id="20" name="TextBox 19"/>
           <p:cNvSpPr txBox="1"/>
           <p:nvPr/>
         </p:nvSpPr>
@@ -5900,7 +5972,7 @@
       </p:sp>
       <p:sp>
         <p:nvSpPr>
-          <p:cNvPr id="20" name="TextBox 19"/>
+          <p:cNvPr id="21" name="TextBox 20"/>
           <p:cNvSpPr txBox="1"/>
           <p:nvPr/>
         </p:nvSpPr>
@@ -6178,16 +6250,40 @@
           </a:p>
         </p:txBody>
       </p:sp>
-      <p:sp>
-        <p:nvSpPr>
-          <p:cNvPr id="3" name="TextBox 2"/>
+      <p:pic>
+        <p:nvPicPr>
+          <p:cNvPr id="3" name="Picture 2" descr="briefcase-15c2b2d4.png"/>
+          <p:cNvPicPr>
+            <a:picLocks noChangeAspect="1"/>
+          </p:cNvPicPr>
+          <p:nvPr/>
+        </p:nvPicPr>
+        <p:blipFill>
+          <a:blip r:embed="rId2"/>
+          <a:stretch>
+            <a:fillRect/>
+          </a:stretch>
+        </p:blipFill>
+        <p:spPr>
+          <a:xfrm>
+            <a:off x="566928" y="877824"/>
+            <a:ext cx="384048" cy="384048"/>
+          </a:xfrm>
+          <a:prstGeom prst="rect">
+            <a:avLst/>
+          </a:prstGeom>
+        </p:spPr>
+      </p:pic>
+      <p:sp>
+        <p:nvSpPr>
+          <p:cNvPr id="4" name="TextBox 3"/>
           <p:cNvSpPr txBox="1"/>
           <p:nvPr/>
         </p:nvSpPr>
         <p:spPr>
           <a:xfrm>
-            <a:off x="566928" y="841248"/>
-            <a:ext cx="11064240" cy="914400"/>
+            <a:off x="1097280" y="841248"/>
+            <a:ext cx="10533888" cy="914400"/>
           </a:xfrm>
           <a:prstGeom prst="rect">
             <a:avLst/>
@@ -6226,7 +6322,7 @@
       </p:sp>
       <p:sp>
         <p:nvSpPr>
-          <p:cNvPr id="4" name="TextBox 3"/>
+          <p:cNvPr id="5" name="TextBox 4"/>
           <p:cNvSpPr txBox="1"/>
           <p:nvPr/>
         </p:nvSpPr>
@@ -6272,7 +6368,7 @@
       </p:sp>
       <p:sp>
         <p:nvSpPr>
-          <p:cNvPr id="5" name="Rectangle 4"/>
+          <p:cNvPr id="6" name="Rectangle 5"/>
           <p:cNvSpPr/>
           <p:nvPr/>
         </p:nvSpPr>
@@ -6316,7 +6412,7 @@
       </p:sp>
       <p:sp>
         <p:nvSpPr>
-          <p:cNvPr id="6" name="Rectangle 5"/>
+          <p:cNvPr id="7" name="Rectangle 6"/>
           <p:cNvSpPr/>
           <p:nvPr/>
         </p:nvSpPr>
@@ -6360,123 +6456,7 @@
       </p:sp>
       <p:pic>
         <p:nvPicPr>
-          <p:cNvPr id="7" name="Picture 6" descr="send-2c3b9e0b.png"/>
-          <p:cNvPicPr>
-            <a:picLocks noChangeAspect="1"/>
-          </p:cNvPicPr>
-          <p:nvPr/>
-        </p:nvPicPr>
-        <p:blipFill>
-          <a:blip r:embed="rId2"/>
-          <a:stretch>
-            <a:fillRect/>
-          </a:stretch>
-        </p:blipFill>
-        <p:spPr>
-          <a:xfrm>
-            <a:off x="566928" y="2670048"/>
-            <a:ext cx="402336" cy="402336"/>
-          </a:xfrm>
-          <a:prstGeom prst="rect">
-            <a:avLst/>
-          </a:prstGeom>
-        </p:spPr>
-      </p:pic>
-      <p:sp>
-        <p:nvSpPr>
-          <p:cNvPr id="8" name="TextBox 7"/>
-          <p:cNvSpPr txBox="1"/>
-          <p:nvPr/>
-        </p:nvSpPr>
-        <p:spPr>
-          <a:xfrm>
-            <a:off x="566928" y="3236976"/>
-            <a:ext cx="5257800" cy="411480"/>
-          </a:xfrm>
-          <a:prstGeom prst="rect">
-            <a:avLst/>
-          </a:prstGeom>
-          <a:noFill/>
-        </p:spPr>
-        <p:txBody>
-          <a:bodyPr wrap="square" anchor="t" lIns="0" rIns="0" tIns="0" bIns="0">
-            <a:spAutoFit/>
-          </a:bodyPr>
-          <a:lstStyle/>
-          <a:p>
-            <a:pPr algn="l">
-              <a:lnSpc>
-                <a:spcPct val="115000"/>
-              </a:lnSpc>
-              <a:spcBef>
-                <a:spcPts val="0"/>
-              </a:spcBef>
-              <a:spcAft>
-                <a:spcPts val="0"/>
-              </a:spcAft>
-            </a:pPr>
-            <a:r>
-              <a:rPr sz="1450" b="1">
-                <a:solidFill>
-                  <a:srgbClr val="1A1A1A"/>
-                </a:solidFill>
-                <a:latin typeface="Pretendard"/>
-                <a:ea typeface="Pretendard"/>
-              </a:rPr>
-              <a:t>송금·결제</a:t>
-            </a:r>
-          </a:p>
-        </p:txBody>
-      </p:sp>
-      <p:sp>
-        <p:nvSpPr>
-          <p:cNvPr id="9" name="TextBox 8"/>
-          <p:cNvSpPr txBox="1"/>
-          <p:nvPr/>
-        </p:nvSpPr>
-        <p:spPr>
-          <a:xfrm>
-            <a:off x="566928" y="3657600"/>
-            <a:ext cx="5257800" cy="608076"/>
-          </a:xfrm>
-          <a:prstGeom prst="rect">
-            <a:avLst/>
-          </a:prstGeom>
-          <a:noFill/>
-        </p:spPr>
-        <p:txBody>
-          <a:bodyPr wrap="square" anchor="t" lIns="0" rIns="0" tIns="0" bIns="0">
-            <a:spAutoFit/>
-          </a:bodyPr>
-          <a:lstStyle/>
-          <a:p>
-            <a:pPr algn="l">
-              <a:lnSpc>
-                <a:spcPct val="140000"/>
-              </a:lnSpc>
-              <a:spcBef>
-                <a:spcPts val="0"/>
-              </a:spcBef>
-              <a:spcAft>
-                <a:spcPts val="0"/>
-              </a:spcAft>
-            </a:pPr>
-            <a:r>
-              <a:rPr sz="1200" b="0">
-                <a:solidFill>
-                  <a:srgbClr val="4A4A4A"/>
-                </a:solidFill>
-                <a:latin typeface="Pretendard"/>
-                <a:ea typeface="Pretendard"/>
-              </a:rPr>
-              <a:t>간편 송금으로 금융의 진입장벽을 낮춥니다.</a:t>
-            </a:r>
-          </a:p>
-        </p:txBody>
-      </p:sp>
-      <p:pic>
-        <p:nvPicPr>
-          <p:cNvPr id="10" name="Picture 9" descr="landmark-2ffd2820.png"/>
+          <p:cNvPr id="8" name="Picture 7" descr="send-2c3b9e0b.png"/>
           <p:cNvPicPr>
             <a:picLocks noChangeAspect="1"/>
           </p:cNvPicPr>
@@ -6490,7 +6470,7 @@
         </p:blipFill>
         <p:spPr>
           <a:xfrm>
-            <a:off x="6373368" y="2670048"/>
+            <a:off x="566928" y="2670048"/>
             <a:ext cx="402336" cy="402336"/>
           </a:xfrm>
           <a:prstGeom prst="rect">
@@ -6500,13 +6480,13 @@
       </p:pic>
       <p:sp>
         <p:nvSpPr>
-          <p:cNvPr id="11" name="TextBox 10"/>
+          <p:cNvPr id="9" name="TextBox 8"/>
           <p:cNvSpPr txBox="1"/>
           <p:nvPr/>
         </p:nvSpPr>
         <p:spPr>
           <a:xfrm>
-            <a:off x="6373368" y="3236976"/>
+            <a:off x="566928" y="3236976"/>
             <a:ext cx="5257800" cy="411480"/>
           </a:xfrm>
           <a:prstGeom prst="rect">
@@ -6539,20 +6519,20 @@
                 <a:latin typeface="Pretendard"/>
                 <a:ea typeface="Pretendard"/>
               </a:rPr>
-              <a:t>토스뱅크</a:t>
-            </a:r>
-          </a:p>
-        </p:txBody>
-      </p:sp>
-      <p:sp>
-        <p:nvSpPr>
-          <p:cNvPr id="12" name="TextBox 11"/>
+              <a:t>송금·결제</a:t>
+            </a:r>
+          </a:p>
+        </p:txBody>
+      </p:sp>
+      <p:sp>
+        <p:nvSpPr>
+          <p:cNvPr id="10" name="TextBox 9"/>
           <p:cNvSpPr txBox="1"/>
           <p:nvPr/>
         </p:nvSpPr>
         <p:spPr>
           <a:xfrm>
-            <a:off x="6373368" y="3657600"/>
+            <a:off x="566928" y="3657600"/>
             <a:ext cx="5257800" cy="608076"/>
           </a:xfrm>
           <a:prstGeom prst="rect">
@@ -6585,14 +6565,14 @@
                 <a:latin typeface="Pretendard"/>
                 <a:ea typeface="Pretendard"/>
               </a:rPr>
-              <a:t>인터넷은행으로 쉬운 여·수신 경험을 제공합니다.</a:t>
+              <a:t>간편 송금으로 금융의 진입장벽을 낮춥니다.</a:t>
             </a:r>
           </a:p>
         </p:txBody>
       </p:sp>
       <p:pic>
         <p:nvPicPr>
-          <p:cNvPr id="13" name="Picture 12" descr="trending-up-38f39414.png"/>
+          <p:cNvPr id="11" name="Picture 10" descr="landmark-2ffd2820.png"/>
           <p:cNvPicPr>
             <a:picLocks noChangeAspect="1"/>
           </p:cNvPicPr>
@@ -6606,7 +6586,7 @@
         </p:blipFill>
         <p:spPr>
           <a:xfrm>
-            <a:off x="566928" y="4421124"/>
+            <a:off x="6373368" y="2670048"/>
             <a:ext cx="402336" cy="402336"/>
           </a:xfrm>
           <a:prstGeom prst="rect">
@@ -6616,13 +6596,13 @@
       </p:pic>
       <p:sp>
         <p:nvSpPr>
-          <p:cNvPr id="14" name="TextBox 13"/>
+          <p:cNvPr id="12" name="TextBox 11"/>
           <p:cNvSpPr txBox="1"/>
           <p:nvPr/>
         </p:nvSpPr>
         <p:spPr>
           <a:xfrm>
-            <a:off x="566928" y="4988052"/>
+            <a:off x="6373368" y="3236976"/>
             <a:ext cx="5257800" cy="411480"/>
           </a:xfrm>
           <a:prstGeom prst="rect">
@@ -6655,20 +6635,20 @@
                 <a:latin typeface="Pretendard"/>
                 <a:ea typeface="Pretendard"/>
               </a:rPr>
-              <a:t>토스증권</a:t>
-            </a:r>
-          </a:p>
-        </p:txBody>
-      </p:sp>
-      <p:sp>
-        <p:nvSpPr>
-          <p:cNvPr id="15" name="TextBox 14"/>
+              <a:t>토스뱅크</a:t>
+            </a:r>
+          </a:p>
+        </p:txBody>
+      </p:sp>
+      <p:sp>
+        <p:nvSpPr>
+          <p:cNvPr id="13" name="TextBox 12"/>
           <p:cNvSpPr txBox="1"/>
           <p:nvPr/>
         </p:nvSpPr>
         <p:spPr>
           <a:xfrm>
-            <a:off x="566928" y="5408676"/>
+            <a:off x="6373368" y="3657600"/>
             <a:ext cx="5257800" cy="608076"/>
           </a:xfrm>
           <a:prstGeom prst="rect">
@@ -6701,14 +6681,14 @@
                 <a:latin typeface="Pretendard"/>
                 <a:ea typeface="Pretendard"/>
               </a:rPr>
-              <a:t>모바일 증권으로 투자를 쉽고 투명하게 만듭니다.</a:t>
+              <a:t>인터넷은행으로 쉬운 여·수신 경험을 제공합니다.</a:t>
             </a:r>
           </a:p>
         </p:txBody>
       </p:sp>
       <p:pic>
         <p:nvPicPr>
-          <p:cNvPr id="16" name="Picture 15" descr="credit-card-5562528e.png"/>
+          <p:cNvPr id="14" name="Picture 13" descr="trending-up-38f39414.png"/>
           <p:cNvPicPr>
             <a:picLocks noChangeAspect="1"/>
           </p:cNvPicPr>
@@ -6722,7 +6702,7 @@
         </p:blipFill>
         <p:spPr>
           <a:xfrm>
-            <a:off x="6373368" y="4421124"/>
+            <a:off x="566928" y="4421124"/>
             <a:ext cx="402336" cy="402336"/>
           </a:xfrm>
           <a:prstGeom prst="rect">
@@ -6732,13 +6712,13 @@
       </p:pic>
       <p:sp>
         <p:nvSpPr>
-          <p:cNvPr id="17" name="TextBox 16"/>
+          <p:cNvPr id="15" name="TextBox 14"/>
           <p:cNvSpPr txBox="1"/>
           <p:nvPr/>
         </p:nvSpPr>
         <p:spPr>
           <a:xfrm>
-            <a:off x="6373368" y="4988052"/>
+            <a:off x="566928" y="4988052"/>
             <a:ext cx="5257800" cy="411480"/>
           </a:xfrm>
           <a:prstGeom prst="rect">
@@ -6771,6 +6751,122 @@
                 <a:latin typeface="Pretendard"/>
                 <a:ea typeface="Pretendard"/>
               </a:rPr>
+              <a:t>토스증권</a:t>
+            </a:r>
+          </a:p>
+        </p:txBody>
+      </p:sp>
+      <p:sp>
+        <p:nvSpPr>
+          <p:cNvPr id="16" name="TextBox 15"/>
+          <p:cNvSpPr txBox="1"/>
+          <p:nvPr/>
+        </p:nvSpPr>
+        <p:spPr>
+          <a:xfrm>
+            <a:off x="566928" y="5408676"/>
+            <a:ext cx="5257800" cy="608076"/>
+          </a:xfrm>
+          <a:prstGeom prst="rect">
+            <a:avLst/>
+          </a:prstGeom>
+          <a:noFill/>
+        </p:spPr>
+        <p:txBody>
+          <a:bodyPr wrap="square" anchor="t" lIns="0" rIns="0" tIns="0" bIns="0">
+            <a:spAutoFit/>
+          </a:bodyPr>
+          <a:lstStyle/>
+          <a:p>
+            <a:pPr algn="l">
+              <a:lnSpc>
+                <a:spcPct val="140000"/>
+              </a:lnSpc>
+              <a:spcBef>
+                <a:spcPts val="0"/>
+              </a:spcBef>
+              <a:spcAft>
+                <a:spcPts val="0"/>
+              </a:spcAft>
+            </a:pPr>
+            <a:r>
+              <a:rPr sz="1200" b="0">
+                <a:solidFill>
+                  <a:srgbClr val="4A4A4A"/>
+                </a:solidFill>
+                <a:latin typeface="Pretendard"/>
+                <a:ea typeface="Pretendard"/>
+              </a:rPr>
+              <a:t>모바일 증권으로 투자를 쉽고 투명하게 만듭니다.</a:t>
+            </a:r>
+          </a:p>
+        </p:txBody>
+      </p:sp>
+      <p:pic>
+        <p:nvPicPr>
+          <p:cNvPr id="17" name="Picture 16" descr="credit-card-5562528e.png"/>
+          <p:cNvPicPr>
+            <a:picLocks noChangeAspect="1"/>
+          </p:cNvPicPr>
+          <p:nvPr/>
+        </p:nvPicPr>
+        <p:blipFill>
+          <a:blip r:embed="rId6"/>
+          <a:stretch>
+            <a:fillRect/>
+          </a:stretch>
+        </p:blipFill>
+        <p:spPr>
+          <a:xfrm>
+            <a:off x="6373368" y="4421124"/>
+            <a:ext cx="402336" cy="402336"/>
+          </a:xfrm>
+          <a:prstGeom prst="rect">
+            <a:avLst/>
+          </a:prstGeom>
+        </p:spPr>
+      </p:pic>
+      <p:sp>
+        <p:nvSpPr>
+          <p:cNvPr id="18" name="TextBox 17"/>
+          <p:cNvSpPr txBox="1"/>
+          <p:nvPr/>
+        </p:nvSpPr>
+        <p:spPr>
+          <a:xfrm>
+            <a:off x="6373368" y="4988052"/>
+            <a:ext cx="5257800" cy="411480"/>
+          </a:xfrm>
+          <a:prstGeom prst="rect">
+            <a:avLst/>
+          </a:prstGeom>
+          <a:noFill/>
+        </p:spPr>
+        <p:txBody>
+          <a:bodyPr wrap="square" anchor="t" lIns="0" rIns="0" tIns="0" bIns="0">
+            <a:spAutoFit/>
+          </a:bodyPr>
+          <a:lstStyle/>
+          <a:p>
+            <a:pPr algn="l">
+              <a:lnSpc>
+                <a:spcPct val="115000"/>
+              </a:lnSpc>
+              <a:spcBef>
+                <a:spcPts val="0"/>
+              </a:spcBef>
+              <a:spcAft>
+                <a:spcPts val="0"/>
+              </a:spcAft>
+            </a:pPr>
+            <a:r>
+              <a:rPr sz="1450" b="1">
+                <a:solidFill>
+                  <a:srgbClr val="1A1A1A"/>
+                </a:solidFill>
+                <a:latin typeface="Pretendard"/>
+                <a:ea typeface="Pretendard"/>
+              </a:rPr>
               <a:t>토스페이먼츠</a:t>
             </a:r>
           </a:p>
@@ -6778,7 +6874,7 @@
       </p:sp>
       <p:sp>
         <p:nvSpPr>
-          <p:cNvPr id="18" name="TextBox 17"/>
+          <p:cNvPr id="19" name="TextBox 18"/>
           <p:cNvSpPr txBox="1"/>
           <p:nvPr/>
         </p:nvSpPr>
@@ -6894,16 +6990,40 @@
           </a:p>
         </p:txBody>
       </p:sp>
-      <p:sp>
-        <p:nvSpPr>
-          <p:cNvPr id="3" name="TextBox 2"/>
+      <p:pic>
+        <p:nvPicPr>
+          <p:cNvPr id="3" name="Picture 2" descr="compass-d9508a50.png"/>
+          <p:cNvPicPr>
+            <a:picLocks noChangeAspect="1"/>
+          </p:cNvPicPr>
+          <p:nvPr/>
+        </p:nvPicPr>
+        <p:blipFill>
+          <a:blip r:embed="rId2"/>
+          <a:stretch>
+            <a:fillRect/>
+          </a:stretch>
+        </p:blipFill>
+        <p:spPr>
+          <a:xfrm>
+            <a:off x="566928" y="877824"/>
+            <a:ext cx="384048" cy="384048"/>
+          </a:xfrm>
+          <a:prstGeom prst="rect">
+            <a:avLst/>
+          </a:prstGeom>
+        </p:spPr>
+      </p:pic>
+      <p:sp>
+        <p:nvSpPr>
+          <p:cNvPr id="4" name="TextBox 3"/>
           <p:cNvSpPr txBox="1"/>
           <p:nvPr/>
         </p:nvSpPr>
         <p:spPr>
           <a:xfrm>
-            <a:off x="566928" y="841248"/>
-            <a:ext cx="11064240" cy="914400"/>
+            <a:off x="1097280" y="841248"/>
+            <a:ext cx="10533888" cy="914400"/>
           </a:xfrm>
           <a:prstGeom prst="rect">
             <a:avLst/>
@@ -6942,7 +7062,7 @@
       </p:sp>
       <p:sp>
         <p:nvSpPr>
-          <p:cNvPr id="4" name="TextBox 3"/>
+          <p:cNvPr id="5" name="TextBox 4"/>
           <p:cNvSpPr txBox="1"/>
           <p:nvPr/>
         </p:nvSpPr>
@@ -6988,7 +7108,7 @@
       </p:sp>
       <p:sp>
         <p:nvSpPr>
-          <p:cNvPr id="5" name="Rectangle 4"/>
+          <p:cNvPr id="6" name="Rectangle 5"/>
           <p:cNvSpPr/>
           <p:nvPr/>
         </p:nvSpPr>
@@ -7032,7 +7152,7 @@
       </p:sp>
       <p:sp>
         <p:nvSpPr>
-          <p:cNvPr id="6" name="Rectangle 5"/>
+          <p:cNvPr id="7" name="Rectangle 6"/>
           <p:cNvSpPr/>
           <p:nvPr/>
         </p:nvSpPr>
@@ -7076,14 +7196,14 @@
       </p:sp>
       <p:pic>
         <p:nvPicPr>
-          <p:cNvPr id="7" name="Picture 6" descr="table_1.png"/>
+          <p:cNvPr id="8" name="Picture 7" descr="table_1.png"/>
           <p:cNvPicPr>
             <a:picLocks noChangeAspect="1"/>
           </p:cNvPicPr>
           <p:nvPr/>
         </p:nvPicPr>
         <p:blipFill>
-          <a:blip r:embed="rId2"/>
+          <a:blip r:embed="rId3"/>
           <a:stretch>
             <a:fillRect/>
           </a:stretch>
@@ -7170,16 +7290,40 @@
           </a:p>
         </p:txBody>
       </p:sp>
-      <p:sp>
-        <p:nvSpPr>
-          <p:cNvPr id="3" name="TextBox 2"/>
+      <p:pic>
+        <p:nvPicPr>
+          <p:cNvPr id="3" name="Picture 2" descr="compass-d9508a50.png"/>
+          <p:cNvPicPr>
+            <a:picLocks noChangeAspect="1"/>
+          </p:cNvPicPr>
+          <p:nvPr/>
+        </p:nvPicPr>
+        <p:blipFill>
+          <a:blip r:embed="rId2"/>
+          <a:stretch>
+            <a:fillRect/>
+          </a:stretch>
+        </p:blipFill>
+        <p:spPr>
+          <a:xfrm>
+            <a:off x="566928" y="877824"/>
+            <a:ext cx="384048" cy="384048"/>
+          </a:xfrm>
+          <a:prstGeom prst="rect">
+            <a:avLst/>
+          </a:prstGeom>
+        </p:spPr>
+      </p:pic>
+      <p:sp>
+        <p:nvSpPr>
+          <p:cNvPr id="4" name="TextBox 3"/>
           <p:cNvSpPr txBox="1"/>
           <p:nvPr/>
         </p:nvSpPr>
         <p:spPr>
           <a:xfrm>
-            <a:off x="566928" y="841248"/>
-            <a:ext cx="11064240" cy="914400"/>
+            <a:off x="1097280" y="841248"/>
+            <a:ext cx="10533888" cy="914400"/>
           </a:xfrm>
           <a:prstGeom prst="rect">
             <a:avLst/>
@@ -7218,7 +7362,7 @@
       </p:sp>
       <p:sp>
         <p:nvSpPr>
-          <p:cNvPr id="4" name="TextBox 3"/>
+          <p:cNvPr id="5" name="TextBox 4"/>
           <p:cNvSpPr txBox="1"/>
           <p:nvPr/>
         </p:nvSpPr>
@@ -7264,7 +7408,7 @@
       </p:sp>
       <p:sp>
         <p:nvSpPr>
-          <p:cNvPr id="5" name="Rectangle 4"/>
+          <p:cNvPr id="6" name="Rectangle 5"/>
           <p:cNvSpPr/>
           <p:nvPr/>
         </p:nvSpPr>
@@ -7308,7 +7452,7 @@
       </p:sp>
       <p:sp>
         <p:nvSpPr>
-          <p:cNvPr id="6" name="Rectangle 5"/>
+          <p:cNvPr id="7" name="Rectangle 6"/>
           <p:cNvSpPr/>
           <p:nvPr/>
         </p:nvSpPr>
@@ -7352,7 +7496,7 @@
       </p:sp>
       <p:sp>
         <p:nvSpPr>
-          <p:cNvPr id="7" name="TextBox 6"/>
+          <p:cNvPr id="8" name="TextBox 7"/>
           <p:cNvSpPr txBox="1"/>
           <p:nvPr/>
         </p:nvSpPr>
@@ -7398,7 +7542,7 @@
       </p:sp>
       <p:sp>
         <p:nvSpPr>
-          <p:cNvPr id="8" name="TextBox 7"/>
+          <p:cNvPr id="9" name="TextBox 8"/>
           <p:cNvSpPr txBox="1"/>
           <p:nvPr/>
         </p:nvSpPr>
@@ -7444,7 +7588,7 @@
       </p:sp>
       <p:sp>
         <p:nvSpPr>
-          <p:cNvPr id="9" name="TextBox 8"/>
+          <p:cNvPr id="10" name="TextBox 9"/>
           <p:cNvSpPr txBox="1"/>
           <p:nvPr/>
         </p:nvSpPr>
@@ -7490,7 +7634,7 @@
       </p:sp>
       <p:sp>
         <p:nvSpPr>
-          <p:cNvPr id="10" name="TextBox 9"/>
+          <p:cNvPr id="11" name="TextBox 10"/>
           <p:cNvSpPr txBox="1"/>
           <p:nvPr/>
         </p:nvSpPr>
@@ -7536,7 +7680,7 @@
       </p:sp>
       <p:sp>
         <p:nvSpPr>
-          <p:cNvPr id="11" name="TextBox 10"/>
+          <p:cNvPr id="12" name="TextBox 11"/>
           <p:cNvSpPr txBox="1"/>
           <p:nvPr/>
         </p:nvSpPr>
@@ -7582,7 +7726,7 @@
       </p:sp>
       <p:sp>
         <p:nvSpPr>
-          <p:cNvPr id="12" name="TextBox 11"/>
+          <p:cNvPr id="13" name="TextBox 12"/>
           <p:cNvSpPr txBox="1"/>
           <p:nvPr/>
         </p:nvSpPr>
@@ -7628,7 +7772,7 @@
       </p:sp>
       <p:sp>
         <p:nvSpPr>
-          <p:cNvPr id="13" name="TextBox 12"/>
+          <p:cNvPr id="14" name="TextBox 13"/>
           <p:cNvSpPr txBox="1"/>
           <p:nvPr/>
         </p:nvSpPr>
@@ -7674,7 +7818,7 @@
       </p:sp>
       <p:sp>
         <p:nvSpPr>
-          <p:cNvPr id="14" name="TextBox 13"/>
+          <p:cNvPr id="15" name="TextBox 14"/>
           <p:cNvSpPr txBox="1"/>
           <p:nvPr/>
         </p:nvSpPr>
@@ -7720,7 +7864,7 @@
       </p:sp>
       <p:sp>
         <p:nvSpPr>
-          <p:cNvPr id="15" name="TextBox 14"/>
+          <p:cNvPr id="16" name="TextBox 15"/>
           <p:cNvSpPr txBox="1"/>
           <p:nvPr/>
         </p:nvSpPr>
@@ -7766,7 +7910,7 @@
       </p:sp>
       <p:sp>
         <p:nvSpPr>
-          <p:cNvPr id="16" name="TextBox 15"/>
+          <p:cNvPr id="17" name="TextBox 16"/>
           <p:cNvSpPr txBox="1"/>
           <p:nvPr/>
         </p:nvSpPr>
@@ -7812,7 +7956,7 @@
       </p:sp>
       <p:sp>
         <p:nvSpPr>
-          <p:cNvPr id="17" name="TextBox 16"/>
+          <p:cNvPr id="18" name="TextBox 17"/>
           <p:cNvSpPr txBox="1"/>
           <p:nvPr/>
         </p:nvSpPr>
@@ -7858,7 +8002,7 @@
       </p:sp>
       <p:sp>
         <p:nvSpPr>
-          <p:cNvPr id="18" name="TextBox 17"/>
+          <p:cNvPr id="19" name="TextBox 18"/>
           <p:cNvSpPr txBox="1"/>
           <p:nvPr/>
         </p:nvSpPr>
@@ -7904,7 +8048,7 @@
       </p:sp>
       <p:sp>
         <p:nvSpPr>
-          <p:cNvPr id="19" name="TextBox 18"/>
+          <p:cNvPr id="20" name="TextBox 19"/>
           <p:cNvSpPr txBox="1"/>
           <p:nvPr/>
         </p:nvSpPr>
@@ -8020,16 +8164,40 @@
           </a:p>
         </p:txBody>
       </p:sp>
-      <p:sp>
-        <p:nvSpPr>
-          <p:cNvPr id="3" name="TextBox 2"/>
+      <p:pic>
+        <p:nvPicPr>
+          <p:cNvPr id="3" name="Picture 2" descr="trending-up-ad54c90b.png"/>
+          <p:cNvPicPr>
+            <a:picLocks noChangeAspect="1"/>
+          </p:cNvPicPr>
+          <p:nvPr/>
+        </p:nvPicPr>
+        <p:blipFill>
+          <a:blip r:embed="rId2"/>
+          <a:stretch>
+            <a:fillRect/>
+          </a:stretch>
+        </p:blipFill>
+        <p:spPr>
+          <a:xfrm>
+            <a:off x="566928" y="877824"/>
+            <a:ext cx="384048" cy="384048"/>
+          </a:xfrm>
+          <a:prstGeom prst="rect">
+            <a:avLst/>
+          </a:prstGeom>
+        </p:spPr>
+      </p:pic>
+      <p:sp>
+        <p:nvSpPr>
+          <p:cNvPr id="4" name="TextBox 3"/>
           <p:cNvSpPr txBox="1"/>
           <p:nvPr/>
         </p:nvSpPr>
         <p:spPr>
           <a:xfrm>
-            <a:off x="566928" y="841248"/>
-            <a:ext cx="11064240" cy="914400"/>
+            <a:off x="1097280" y="841248"/>
+            <a:ext cx="10533888" cy="914400"/>
           </a:xfrm>
           <a:prstGeom prst="rect">
             <a:avLst/>
@@ -8068,7 +8236,7 @@
       </p:sp>
       <p:sp>
         <p:nvSpPr>
-          <p:cNvPr id="4" name="TextBox 3"/>
+          <p:cNvPr id="5" name="TextBox 4"/>
           <p:cNvSpPr txBox="1"/>
           <p:nvPr/>
         </p:nvSpPr>
@@ -8114,7 +8282,7 @@
       </p:sp>
       <p:sp>
         <p:nvSpPr>
-          <p:cNvPr id="5" name="Rectangle 4"/>
+          <p:cNvPr id="6" name="Rectangle 5"/>
           <p:cNvSpPr/>
           <p:nvPr/>
         </p:nvSpPr>
@@ -8158,7 +8326,7 @@
       </p:sp>
       <p:sp>
         <p:nvSpPr>
-          <p:cNvPr id="6" name="Rectangle 5"/>
+          <p:cNvPr id="7" name="Rectangle 6"/>
           <p:cNvSpPr/>
           <p:nvPr/>
         </p:nvSpPr>
@@ -8202,14 +8370,14 @@
       </p:sp>
       <p:pic>
         <p:nvPicPr>
-          <p:cNvPr id="7" name="Picture 6" descr="roadmap.png"/>
+          <p:cNvPr id="8" name="Picture 7" descr="roadmap.png"/>
           <p:cNvPicPr>
             <a:picLocks noChangeAspect="1"/>
           </p:cNvPicPr>
           <p:nvPr/>
         </p:nvPicPr>
         <p:blipFill>
-          <a:blip r:embed="rId2"/>
+          <a:blip r:embed="rId3"/>
           <a:stretch>
             <a:fillRect/>
           </a:stretch>
